--- a/AVERA_Pitch_Medical.pptx
+++ b/AVERA_Pitch_Medical.pptx
@@ -1517,6 +1517,10 @@
           </a:solidFill>
           <a:ln/>
         </p:spPr>
+        <p:txBody>
+          <a:bodyPr/>
+          <a:p/>
+        </p:txBody>
       </p:sp>
       <p:sp>
         <p:nvSpPr>
@@ -1710,6 +1714,10 @@
           </a:solidFill>
           <a:ln/>
         </p:spPr>
+        <p:txBody>
+          <a:bodyPr/>
+          <a:p/>
+        </p:txBody>
       </p:sp>
       <p:sp>
         <p:nvSpPr>
@@ -1744,7 +1752,7 @@
                 <a:ea typeface="Calibri" pitchFamily="34" charset="-122"/>
                 <a:cs typeface="Calibri" pitchFamily="34" charset="-120"/>
               </a:rPr>
-              <a:t>Live Demo: avera-demo.up.railway.app   ·   Contact: mgaloyan79@gmail.com</a:t>
+              <a:t>Live Demo: avera-production.up.railway.app   ·   Contact: mgaloyan79@gmail.com</a:t>
             </a:r>
             <a:endParaRPr lang="en-US" sz="1000" dirty="0"/>
           </a:p>
@@ -1801,6 +1809,10 @@
           </a:solidFill>
           <a:ln/>
         </p:spPr>
+        <p:txBody>
+          <a:bodyPr/>
+          <a:p/>
+        </p:txBody>
       </p:sp>
       <p:sp>
         <p:nvSpPr>
@@ -1867,6 +1879,10 @@
             </a:outerShdw>
           </a:effectLst>
         </p:spPr>
+        <p:txBody>
+          <a:bodyPr/>
+          <a:p/>
+        </p:txBody>
       </p:sp>
       <p:sp>
         <p:nvSpPr>
@@ -1887,6 +1903,10 @@
           </a:solidFill>
           <a:ln/>
         </p:spPr>
+        <p:txBody>
+          <a:bodyPr/>
+          <a:p/>
+        </p:txBody>
       </p:sp>
       <p:sp>
         <p:nvSpPr>
@@ -2067,6 +2087,10 @@
             </a:outerShdw>
           </a:effectLst>
         </p:spPr>
+        <p:txBody>
+          <a:bodyPr/>
+          <a:p/>
+        </p:txBody>
       </p:sp>
       <p:sp>
         <p:nvSpPr>
@@ -2087,6 +2111,10 @@
           </a:solidFill>
           <a:ln/>
         </p:spPr>
+        <p:txBody>
+          <a:bodyPr/>
+          <a:p/>
+        </p:txBody>
       </p:sp>
       <p:sp>
         <p:nvSpPr>
@@ -2267,6 +2295,10 @@
             </a:outerShdw>
           </a:effectLst>
         </p:spPr>
+        <p:txBody>
+          <a:bodyPr/>
+          <a:p/>
+        </p:txBody>
       </p:sp>
       <p:sp>
         <p:nvSpPr>
@@ -2287,6 +2319,10 @@
           </a:solidFill>
           <a:ln/>
         </p:spPr>
+        <p:txBody>
+          <a:bodyPr/>
+          <a:p/>
+        </p:txBody>
       </p:sp>
       <p:sp>
         <p:nvSpPr>
@@ -2633,6 +2669,10 @@
             </a:outerShdw>
           </a:effectLst>
         </p:spPr>
+        <p:txBody>
+          <a:bodyPr/>
+          <a:p/>
+        </p:txBody>
       </p:sp>
       <p:sp>
         <p:nvSpPr>
@@ -2653,6 +2693,10 @@
           </a:solidFill>
           <a:ln/>
         </p:spPr>
+        <p:txBody>
+          <a:bodyPr/>
+          <a:p/>
+        </p:txBody>
       </p:sp>
       <p:sp>
         <p:nvSpPr>
@@ -2797,6 +2841,10 @@
             </a:outerShdw>
           </a:effectLst>
         </p:spPr>
+        <p:txBody>
+          <a:bodyPr/>
+          <a:p/>
+        </p:txBody>
       </p:sp>
       <p:sp>
         <p:nvSpPr>
@@ -2817,6 +2865,10 @@
           </a:solidFill>
           <a:ln/>
         </p:spPr>
+        <p:txBody>
+          <a:bodyPr/>
+          <a:p/>
+        </p:txBody>
       </p:sp>
       <p:sp>
         <p:nvSpPr>
@@ -2961,6 +3013,10 @@
             </a:outerShdw>
           </a:effectLst>
         </p:spPr>
+        <p:txBody>
+          <a:bodyPr/>
+          <a:p/>
+        </p:txBody>
       </p:sp>
       <p:sp>
         <p:nvSpPr>
@@ -2981,6 +3037,10 @@
           </a:solidFill>
           <a:ln/>
         </p:spPr>
+        <p:txBody>
+          <a:bodyPr/>
+          <a:p/>
+        </p:txBody>
       </p:sp>
       <p:sp>
         <p:nvSpPr>
@@ -3125,6 +3185,10 @@
             </a:outerShdw>
           </a:effectLst>
         </p:spPr>
+        <p:txBody>
+          <a:bodyPr/>
+          <a:p/>
+        </p:txBody>
       </p:sp>
       <p:sp>
         <p:nvSpPr>
@@ -3145,6 +3209,10 @@
           </a:solidFill>
           <a:ln/>
         </p:spPr>
+        <p:txBody>
+          <a:bodyPr/>
+          <a:p/>
+        </p:txBody>
       </p:sp>
       <p:sp>
         <p:nvSpPr>
@@ -3314,6 +3382,10 @@
           </a:solidFill>
           <a:ln/>
         </p:spPr>
+        <p:txBody>
+          <a:bodyPr/>
+          <a:p/>
+        </p:txBody>
       </p:sp>
       <p:sp>
         <p:nvSpPr>
@@ -3373,6 +3445,10 @@
           </a:solidFill>
           <a:ln/>
         </p:spPr>
+        <p:txBody>
+          <a:bodyPr/>
+          <a:p/>
+        </p:txBody>
       </p:sp>
       <p:sp>
         <p:nvSpPr>
@@ -3393,6 +3469,10 @@
           </a:solidFill>
           <a:ln/>
         </p:spPr>
+        <p:txBody>
+          <a:bodyPr/>
+          <a:p/>
+        </p:txBody>
       </p:sp>
       <p:sp>
         <p:nvSpPr>
@@ -3530,6 +3610,10 @@
           </a:solidFill>
           <a:ln/>
         </p:spPr>
+        <p:txBody>
+          <a:bodyPr/>
+          <a:p/>
+        </p:txBody>
       </p:sp>
       <p:sp>
         <p:nvSpPr>
@@ -3550,6 +3634,10 @@
           </a:solidFill>
           <a:ln/>
         </p:spPr>
+        <p:txBody>
+          <a:bodyPr/>
+          <a:p/>
+        </p:txBody>
       </p:sp>
       <p:sp>
         <p:nvSpPr>
@@ -3687,6 +3775,10 @@
           </a:solidFill>
           <a:ln/>
         </p:spPr>
+        <p:txBody>
+          <a:bodyPr/>
+          <a:p/>
+        </p:txBody>
       </p:sp>
       <p:sp>
         <p:nvSpPr>
@@ -3707,6 +3799,10 @@
           </a:solidFill>
           <a:ln/>
         </p:spPr>
+        <p:txBody>
+          <a:bodyPr/>
+          <a:p/>
+        </p:txBody>
       </p:sp>
       <p:sp>
         <p:nvSpPr>
@@ -3844,6 +3940,10 @@
           </a:solidFill>
           <a:ln/>
         </p:spPr>
+        <p:txBody>
+          <a:bodyPr/>
+          <a:p/>
+        </p:txBody>
       </p:sp>
       <p:sp>
         <p:nvSpPr>
@@ -4098,6 +4198,10 @@
             </a:outerShdw>
           </a:effectLst>
         </p:spPr>
+        <p:txBody>
+          <a:bodyPr/>
+          <a:p/>
+        </p:txBody>
       </p:sp>
       <p:sp>
         <p:nvSpPr>
@@ -4242,6 +4346,10 @@
             </a:outerShdw>
           </a:effectLst>
         </p:spPr>
+        <p:txBody>
+          <a:bodyPr/>
+          <a:p/>
+        </p:txBody>
       </p:sp>
       <p:sp>
         <p:nvSpPr>
@@ -4386,6 +4494,10 @@
             </a:outerShdw>
           </a:effectLst>
         </p:spPr>
+        <p:txBody>
+          <a:bodyPr/>
+          <a:p/>
+        </p:txBody>
       </p:sp>
       <p:sp>
         <p:nvSpPr>
@@ -4530,6 +4642,10 @@
             </a:outerShdw>
           </a:effectLst>
         </p:spPr>
+        <p:txBody>
+          <a:bodyPr/>
+          <a:p/>
+        </p:txBody>
       </p:sp>
       <p:sp>
         <p:nvSpPr>
@@ -4738,6 +4854,10 @@
           </a:solidFill>
           <a:ln/>
         </p:spPr>
+        <p:txBody>
+          <a:bodyPr/>
+          <a:p/>
+        </p:txBody>
       </p:sp>
       <p:sp>
         <p:nvSpPr>
@@ -6491,6 +6611,10 @@
             </a:outerShdw>
           </a:effectLst>
         </p:spPr>
+        <p:txBody>
+          <a:bodyPr/>
+          <a:p/>
+        </p:txBody>
       </p:sp>
       <p:sp>
         <p:nvSpPr>
@@ -6525,7 +6649,7 @@
                 <a:ea typeface="Consolas" pitchFamily="34" charset="-122"/>
                 <a:cs typeface="Consolas" pitchFamily="34" charset="-120"/>
               </a:rPr>
-              <a:t>https://avera-demo.up.railway.app</a:t>
+              <a:t>https://avera-production.up.railway.app</a:t>
             </a:r>
             <a:endParaRPr lang="en-US" sz="2200" dirty="0"/>
           </a:p>
@@ -6784,6 +6908,10 @@
           </a:solidFill>
           <a:ln/>
         </p:spPr>
+        <p:txBody>
+          <a:bodyPr/>
+          <a:p/>
+        </p:txBody>
       </p:sp>
       <p:sp>
         <p:nvSpPr>
@@ -6875,6 +7003,10 @@
           </a:solidFill>
           <a:ln/>
         </p:spPr>
+        <p:txBody>
+          <a:bodyPr/>
+          <a:p/>
+        </p:txBody>
       </p:sp>
       <p:sp>
         <p:nvSpPr>
@@ -6895,6 +7027,10 @@
           </a:solidFill>
           <a:ln/>
         </p:spPr>
+        <p:txBody>
+          <a:bodyPr/>
+          <a:p/>
+        </p:txBody>
       </p:sp>
       <p:sp>
         <p:nvSpPr>
@@ -7034,6 +7170,10 @@
             </a:outerShdw>
           </a:effectLst>
         </p:spPr>
+        <p:txBody>
+          <a:bodyPr/>
+          <a:p/>
+        </p:txBody>
       </p:sp>
       <p:sp>
         <p:nvSpPr>
@@ -7143,7 +7283,7 @@
                 <a:ea typeface="Calibri" pitchFamily="34" charset="-122"/>
                 <a:cs typeface="Calibri" pitchFamily="34" charset="-120"/>
               </a:rPr>
-              <a:t>avera-demo.up.railway.app</a:t>
+              <a:t>avera-production.up.railway.app</a:t>
             </a:r>
             <a:endParaRPr lang="en-US" sz="900" dirty="0"/>
           </a:p>
@@ -7175,6 +7315,10 @@
             </a:outerShdw>
           </a:effectLst>
         </p:spPr>
+        <p:txBody>
+          <a:bodyPr/>
+          <a:p/>
+        </p:txBody>
       </p:sp>
       <p:sp>
         <p:nvSpPr>
@@ -7316,6 +7460,10 @@
             </a:outerShdw>
           </a:effectLst>
         </p:spPr>
+        <p:txBody>
+          <a:bodyPr/>
+          <a:p/>
+        </p:txBody>
       </p:sp>
       <p:sp>
         <p:nvSpPr>
